--- a/manuscript/Presentation.pptx
+++ b/manuscript/Presentation.pptx
@@ -268,7 +268,7 @@
           <a:p>
             <a:fld id="{31268FC7-285F-4E3C-9BC4-CF17A7AA4125}" type="datetimeFigureOut">
               <a:rPr lang="en-US" smtClean="0"/>
-              <a:t>2/18/2025</a:t>
+              <a:t>3/26/2025</a:t>
             </a:fld>
             <a:endParaRPr lang="en-US"/>
           </a:p>
@@ -466,7 +466,7 @@
           <a:p>
             <a:fld id="{31268FC7-285F-4E3C-9BC4-CF17A7AA4125}" type="datetimeFigureOut">
               <a:rPr lang="en-US" smtClean="0"/>
-              <a:t>2/18/2025</a:t>
+              <a:t>3/26/2025</a:t>
             </a:fld>
             <a:endParaRPr lang="en-US"/>
           </a:p>
@@ -674,7 +674,7 @@
           <a:p>
             <a:fld id="{31268FC7-285F-4E3C-9BC4-CF17A7AA4125}" type="datetimeFigureOut">
               <a:rPr lang="en-US" smtClean="0"/>
-              <a:t>2/18/2025</a:t>
+              <a:t>3/26/2025</a:t>
             </a:fld>
             <a:endParaRPr lang="en-US"/>
           </a:p>
@@ -872,7 +872,7 @@
           <a:p>
             <a:fld id="{31268FC7-285F-4E3C-9BC4-CF17A7AA4125}" type="datetimeFigureOut">
               <a:rPr lang="en-US" smtClean="0"/>
-              <a:t>2/18/2025</a:t>
+              <a:t>3/26/2025</a:t>
             </a:fld>
             <a:endParaRPr lang="en-US"/>
           </a:p>
@@ -1147,7 +1147,7 @@
           <a:p>
             <a:fld id="{31268FC7-285F-4E3C-9BC4-CF17A7AA4125}" type="datetimeFigureOut">
               <a:rPr lang="en-US" smtClean="0"/>
-              <a:t>2/18/2025</a:t>
+              <a:t>3/26/2025</a:t>
             </a:fld>
             <a:endParaRPr lang="en-US"/>
           </a:p>
@@ -1412,7 +1412,7 @@
           <a:p>
             <a:fld id="{31268FC7-285F-4E3C-9BC4-CF17A7AA4125}" type="datetimeFigureOut">
               <a:rPr lang="en-US" smtClean="0"/>
-              <a:t>2/18/2025</a:t>
+              <a:t>3/26/2025</a:t>
             </a:fld>
             <a:endParaRPr lang="en-US"/>
           </a:p>
@@ -1824,7 +1824,7 @@
           <a:p>
             <a:fld id="{31268FC7-285F-4E3C-9BC4-CF17A7AA4125}" type="datetimeFigureOut">
               <a:rPr lang="en-US" smtClean="0"/>
-              <a:t>2/18/2025</a:t>
+              <a:t>3/26/2025</a:t>
             </a:fld>
             <a:endParaRPr lang="en-US"/>
           </a:p>
@@ -1965,7 +1965,7 @@
           <a:p>
             <a:fld id="{31268FC7-285F-4E3C-9BC4-CF17A7AA4125}" type="datetimeFigureOut">
               <a:rPr lang="en-US" smtClean="0"/>
-              <a:t>2/18/2025</a:t>
+              <a:t>3/26/2025</a:t>
             </a:fld>
             <a:endParaRPr lang="en-US"/>
           </a:p>
@@ -2078,7 +2078,7 @@
           <a:p>
             <a:fld id="{31268FC7-285F-4E3C-9BC4-CF17A7AA4125}" type="datetimeFigureOut">
               <a:rPr lang="en-US" smtClean="0"/>
-              <a:t>2/18/2025</a:t>
+              <a:t>3/26/2025</a:t>
             </a:fld>
             <a:endParaRPr lang="en-US"/>
           </a:p>
@@ -2389,7 +2389,7 @@
           <a:p>
             <a:fld id="{31268FC7-285F-4E3C-9BC4-CF17A7AA4125}" type="datetimeFigureOut">
               <a:rPr lang="en-US" smtClean="0"/>
-              <a:t>2/18/2025</a:t>
+              <a:t>3/26/2025</a:t>
             </a:fld>
             <a:endParaRPr lang="en-US"/>
           </a:p>
@@ -2677,7 +2677,7 @@
           <a:p>
             <a:fld id="{31268FC7-285F-4E3C-9BC4-CF17A7AA4125}" type="datetimeFigureOut">
               <a:rPr lang="en-US" smtClean="0"/>
-              <a:t>2/18/2025</a:t>
+              <a:t>3/26/2025</a:t>
             </a:fld>
             <a:endParaRPr lang="en-US"/>
           </a:p>
@@ -2918,7 +2918,7 @@
           <a:p>
             <a:fld id="{31268FC7-285F-4E3C-9BC4-CF17A7AA4125}" type="datetimeFigureOut">
               <a:rPr lang="en-US" smtClean="0"/>
-              <a:t>2/18/2025</a:t>
+              <a:t>3/26/2025</a:t>
             </a:fld>
             <a:endParaRPr lang="en-US"/>
           </a:p>
@@ -3440,31 +3440,55 @@
           </a:p>
         </p:txBody>
       </p:sp>
-      <p:sp>
-        <p:nvSpPr>
-          <p:cNvPr id="3" name="Content Placeholder 2">
-            <a:extLst>
-              <a:ext uri="{FF2B5EF4-FFF2-40B4-BE49-F238E27FC236}">
-                <a16:creationId xmlns:a16="http://schemas.microsoft.com/office/drawing/2014/main" id="{D08CC6B8-3ABC-A6E5-61C4-8A91A467EF7E}"/>
-              </a:ext>
-            </a:extLst>
-          </p:cNvPr>
-          <p:cNvSpPr>
-            <a:spLocks noGrp="1"/>
-          </p:cNvSpPr>
+      <p:pic>
+        <p:nvPicPr>
+          <p:cNvPr id="1026" name="Picture 2">
+            <a:extLst>
+              <a:ext uri="{FF2B5EF4-FFF2-40B4-BE49-F238E27FC236}">
+                <a16:creationId xmlns:a16="http://schemas.microsoft.com/office/drawing/2014/main" id="{376FCD16-5BB5-117C-DE72-F3396111B7CC}"/>
+              </a:ext>
+            </a:extLst>
+          </p:cNvPr>
+          <p:cNvPicPr>
+            <a:picLocks noGrp="1" noChangeAspect="1" noChangeArrowheads="1"/>
+          </p:cNvPicPr>
           <p:nvPr>
             <p:ph idx="1"/>
           </p:nvPr>
-        </p:nvSpPr>
-        <p:spPr/>
-        <p:txBody>
-          <a:bodyPr/>
-          <a:lstStyle/>
-          <a:p>
-            <a:endParaRPr lang="en-US"/>
-          </a:p>
-        </p:txBody>
-      </p:sp>
+        </p:nvPicPr>
+        <p:blipFill>
+          <a:blip r:embed="rId2">
+            <a:extLst>
+              <a:ext uri="{28A0092B-C50C-407E-A947-70E740481C1C}">
+                <a14:useLocalDpi xmlns:a14="http://schemas.microsoft.com/office/drawing/2010/main" val="0"/>
+              </a:ext>
+            </a:extLst>
+          </a:blip>
+          <a:srcRect/>
+          <a:stretch>
+            <a:fillRect/>
+          </a:stretch>
+        </p:blipFill>
+        <p:spPr bwMode="auto">
+          <a:xfrm>
+            <a:off x="2588357" y="1825625"/>
+            <a:ext cx="7015286" cy="4351338"/>
+          </a:xfrm>
+          <a:prstGeom prst="rect">
+            <a:avLst/>
+          </a:prstGeom>
+          <a:noFill/>
+          <a:extLst>
+            <a:ext uri="{909E8E84-426E-40DD-AFC4-6F175D3DCCD1}">
+              <a14:hiddenFill xmlns:a14="http://schemas.microsoft.com/office/drawing/2010/main">
+                <a:solidFill>
+                  <a:srgbClr val="FFFFFF"/>
+                </a:solidFill>
+              </a14:hiddenFill>
+            </a:ext>
+          </a:extLst>
+        </p:spPr>
+      </p:pic>
     </p:spTree>
     <p:extLst>
       <p:ext uri="{BB962C8B-B14F-4D97-AF65-F5344CB8AC3E}">

--- a/manuscript/Presentation.pptx
+++ b/manuscript/Presentation.pptx
@@ -15,6 +15,7 @@
     <p:sldId id="259" r:id="rId9"/>
     <p:sldId id="260" r:id="rId10"/>
     <p:sldId id="261" r:id="rId11"/>
+    <p:sldId id="266" r:id="rId12"/>
   </p:sldIdLst>
   <p:sldSz cx="12192000" cy="6858000"/>
   <p:notesSz cx="6858000" cy="9144000"/>
@@ -268,7 +269,7 @@
           <a:p>
             <a:fld id="{31268FC7-285F-4E3C-9BC4-CF17A7AA4125}" type="datetimeFigureOut">
               <a:rPr lang="en-US" smtClean="0"/>
-              <a:t>3/26/2025</a:t>
+              <a:t>5/11/2025</a:t>
             </a:fld>
             <a:endParaRPr lang="en-US"/>
           </a:p>
@@ -466,7 +467,7 @@
           <a:p>
             <a:fld id="{31268FC7-285F-4E3C-9BC4-CF17A7AA4125}" type="datetimeFigureOut">
               <a:rPr lang="en-US" smtClean="0"/>
-              <a:t>3/26/2025</a:t>
+              <a:t>5/11/2025</a:t>
             </a:fld>
             <a:endParaRPr lang="en-US"/>
           </a:p>
@@ -674,7 +675,7 @@
           <a:p>
             <a:fld id="{31268FC7-285F-4E3C-9BC4-CF17A7AA4125}" type="datetimeFigureOut">
               <a:rPr lang="en-US" smtClean="0"/>
-              <a:t>3/26/2025</a:t>
+              <a:t>5/11/2025</a:t>
             </a:fld>
             <a:endParaRPr lang="en-US"/>
           </a:p>
@@ -872,7 +873,7 @@
           <a:p>
             <a:fld id="{31268FC7-285F-4E3C-9BC4-CF17A7AA4125}" type="datetimeFigureOut">
               <a:rPr lang="en-US" smtClean="0"/>
-              <a:t>3/26/2025</a:t>
+              <a:t>5/11/2025</a:t>
             </a:fld>
             <a:endParaRPr lang="en-US"/>
           </a:p>
@@ -1147,7 +1148,7 @@
           <a:p>
             <a:fld id="{31268FC7-285F-4E3C-9BC4-CF17A7AA4125}" type="datetimeFigureOut">
               <a:rPr lang="en-US" smtClean="0"/>
-              <a:t>3/26/2025</a:t>
+              <a:t>5/11/2025</a:t>
             </a:fld>
             <a:endParaRPr lang="en-US"/>
           </a:p>
@@ -1412,7 +1413,7 @@
           <a:p>
             <a:fld id="{31268FC7-285F-4E3C-9BC4-CF17A7AA4125}" type="datetimeFigureOut">
               <a:rPr lang="en-US" smtClean="0"/>
-              <a:t>3/26/2025</a:t>
+              <a:t>5/11/2025</a:t>
             </a:fld>
             <a:endParaRPr lang="en-US"/>
           </a:p>
@@ -1824,7 +1825,7 @@
           <a:p>
             <a:fld id="{31268FC7-285F-4E3C-9BC4-CF17A7AA4125}" type="datetimeFigureOut">
               <a:rPr lang="en-US" smtClean="0"/>
-              <a:t>3/26/2025</a:t>
+              <a:t>5/11/2025</a:t>
             </a:fld>
             <a:endParaRPr lang="en-US"/>
           </a:p>
@@ -1965,7 +1966,7 @@
           <a:p>
             <a:fld id="{31268FC7-285F-4E3C-9BC4-CF17A7AA4125}" type="datetimeFigureOut">
               <a:rPr lang="en-US" smtClean="0"/>
-              <a:t>3/26/2025</a:t>
+              <a:t>5/11/2025</a:t>
             </a:fld>
             <a:endParaRPr lang="en-US"/>
           </a:p>
@@ -2078,7 +2079,7 @@
           <a:p>
             <a:fld id="{31268FC7-285F-4E3C-9BC4-CF17A7AA4125}" type="datetimeFigureOut">
               <a:rPr lang="en-US" smtClean="0"/>
-              <a:t>3/26/2025</a:t>
+              <a:t>5/11/2025</a:t>
             </a:fld>
             <a:endParaRPr lang="en-US"/>
           </a:p>
@@ -2389,7 +2390,7 @@
           <a:p>
             <a:fld id="{31268FC7-285F-4E3C-9BC4-CF17A7AA4125}" type="datetimeFigureOut">
               <a:rPr lang="en-US" smtClean="0"/>
-              <a:t>3/26/2025</a:t>
+              <a:t>5/11/2025</a:t>
             </a:fld>
             <a:endParaRPr lang="en-US"/>
           </a:p>
@@ -2677,7 +2678,7 @@
           <a:p>
             <a:fld id="{31268FC7-285F-4E3C-9BC4-CF17A7AA4125}" type="datetimeFigureOut">
               <a:rPr lang="en-US" smtClean="0"/>
-              <a:t>3/26/2025</a:t>
+              <a:t>5/11/2025</a:t>
             </a:fld>
             <a:endParaRPr lang="en-US"/>
           </a:p>
@@ -2918,7 +2919,7 @@
           <a:p>
             <a:fld id="{31268FC7-285F-4E3C-9BC4-CF17A7AA4125}" type="datetimeFigureOut">
               <a:rPr lang="en-US" smtClean="0"/>
-              <a:t>3/26/2025</a:t>
+              <a:t>5/11/2025</a:t>
             </a:fld>
             <a:endParaRPr lang="en-US"/>
           </a:p>
@@ -3493,6 +3494,90 @@
     <p:extLst>
       <p:ext uri="{BB962C8B-B14F-4D97-AF65-F5344CB8AC3E}">
         <p14:creationId xmlns:p14="http://schemas.microsoft.com/office/powerpoint/2010/main" val="3041153913"/>
+      </p:ext>
+    </p:extLst>
+  </p:cSld>
+  <p:clrMapOvr>
+    <a:masterClrMapping/>
+  </p:clrMapOvr>
+</p:sld>
+</file>
+
+<file path=ppt/slides/slide11.xml><?xml version="1.0" encoding="utf-8"?>
+<p:sld xmlns:a="http://schemas.openxmlformats.org/drawingml/2006/main" xmlns:r="http://schemas.openxmlformats.org/officeDocument/2006/relationships" xmlns:p="http://schemas.openxmlformats.org/presentationml/2006/main">
+  <p:cSld>
+    <p:spTree>
+      <p:nvGrpSpPr>
+        <p:cNvPr id="1" name=""/>
+        <p:cNvGrpSpPr/>
+        <p:nvPr/>
+      </p:nvGrpSpPr>
+      <p:grpSpPr>
+        <a:xfrm>
+          <a:off x="0" y="0"/>
+          <a:ext cx="0" cy="0"/>
+          <a:chOff x="0" y="0"/>
+          <a:chExt cx="0" cy="0"/>
+        </a:xfrm>
+      </p:grpSpPr>
+      <p:sp>
+        <p:nvSpPr>
+          <p:cNvPr id="2" name="Title 1">
+            <a:extLst>
+              <a:ext uri="{FF2B5EF4-FFF2-40B4-BE49-F238E27FC236}">
+                <a16:creationId xmlns:a16="http://schemas.microsoft.com/office/drawing/2014/main" id="{C7606C24-F6F0-070E-232B-76BB0A90D8C3}"/>
+              </a:ext>
+            </a:extLst>
+          </p:cNvPr>
+          <p:cNvSpPr>
+            <a:spLocks noGrp="1"/>
+          </p:cNvSpPr>
+          <p:nvPr>
+            <p:ph type="title"/>
+          </p:nvPr>
+        </p:nvSpPr>
+        <p:spPr/>
+        <p:txBody>
+          <a:bodyPr/>
+          <a:lstStyle/>
+          <a:p>
+            <a:endParaRPr lang="en-US"/>
+          </a:p>
+        </p:txBody>
+      </p:sp>
+      <p:pic>
+        <p:nvPicPr>
+          <p:cNvPr id="5" name="Content Placeholder 4">
+            <a:extLst>
+              <a:ext uri="{FF2B5EF4-FFF2-40B4-BE49-F238E27FC236}">
+                <a16:creationId xmlns:a16="http://schemas.microsoft.com/office/drawing/2014/main" id="{995B5C57-9374-0480-C2EE-7F823C569F0F}"/>
+              </a:ext>
+            </a:extLst>
+          </p:cNvPr>
+          <p:cNvPicPr>
+            <a:picLocks noGrp="1" noChangeAspect="1"/>
+          </p:cNvPicPr>
+          <p:nvPr>
+            <p:ph idx="1"/>
+          </p:nvPr>
+        </p:nvPicPr>
+        <p:blipFill>
+          <a:blip r:embed="rId2"/>
+          <a:stretch>
+            <a:fillRect/>
+          </a:stretch>
+        </p:blipFill>
+        <p:spPr>
+          <a:xfrm>
+            <a:off x="1415569" y="1825625"/>
+            <a:ext cx="9360861" cy="4351338"/>
+          </a:xfrm>
+        </p:spPr>
+      </p:pic>
+    </p:spTree>
+    <p:extLst>
+      <p:ext uri="{BB962C8B-B14F-4D97-AF65-F5344CB8AC3E}">
+        <p14:creationId xmlns:p14="http://schemas.microsoft.com/office/powerpoint/2010/main" val="3617558390"/>
       </p:ext>
     </p:extLst>
   </p:cSld>
